--- a/MyOwnPresentations/pptx/Graph_DFS_BFS_Topo_IX.pptx
+++ b/MyOwnPresentations/pptx/Graph_DFS_BFS_Topo_IX.pptx
@@ -5199,13 +5199,13 @@
       <dgm:prSet presAssocID="{E6428F01-6B4E-40F8-AB7B-52BADA2EBD6A}" presName="iconRect" presStyleLbl="node1" presStyleIdx="0" presStyleCnt="4"/>
       <dgm:spPr>
         <a:blipFill>
-          <a:blip xmlns:r="http://schemas.openxmlformats.org/officeDocument/2006/relationships" r:embed="rId1">
+          <a:blip xmlns:r="http://schemas.openxmlformats.org/officeDocument/2006/relationships">
             <a:extLst>
               <a:ext uri="{28A0092B-C50C-407E-A947-70E740481C1C}">
                 <a14:useLocalDpi xmlns:a14="http://schemas.microsoft.com/office/drawing/2010/main" val="0"/>
               </a:ext>
               <a:ext uri="{96DAC541-7B7A-43D3-8B79-37D633B846F1}">
-                <asvg:svgBlip xmlns:asvg="http://schemas.microsoft.com/office/drawing/2016/SVG/main" r:embed="rId2"/>
+                <asvg:svgBlip xmlns:asvg="http://schemas.microsoft.com/office/drawing/2016/SVG/main" r:embed="rId1"/>
               </a:ext>
             </a:extLst>
           </a:blip>
@@ -5248,13 +5248,13 @@
       <dgm:prSet presAssocID="{65680A8C-59E4-4A71-95BF-8C8A4B30A629}" presName="iconRect" presStyleLbl="node1" presStyleIdx="1" presStyleCnt="4"/>
       <dgm:spPr>
         <a:blipFill>
-          <a:blip xmlns:r="http://schemas.openxmlformats.org/officeDocument/2006/relationships" r:embed="rId3">
+          <a:blip xmlns:r="http://schemas.openxmlformats.org/officeDocument/2006/relationships">
             <a:extLst>
               <a:ext uri="{28A0092B-C50C-407E-A947-70E740481C1C}">
                 <a14:useLocalDpi xmlns:a14="http://schemas.microsoft.com/office/drawing/2010/main" val="0"/>
               </a:ext>
               <a:ext uri="{96DAC541-7B7A-43D3-8B79-37D633B846F1}">
-                <asvg:svgBlip xmlns:asvg="http://schemas.microsoft.com/office/drawing/2016/SVG/main" r:embed="rId4"/>
+                <asvg:svgBlip xmlns:asvg="http://schemas.microsoft.com/office/drawing/2016/SVG/main" r:embed="rId2"/>
               </a:ext>
             </a:extLst>
           </a:blip>
@@ -5297,13 +5297,13 @@
       <dgm:prSet presAssocID="{1E0DABA5-E23F-41FB-828D-4DBE4FE3E698}" presName="iconRect" presStyleLbl="node1" presStyleIdx="2" presStyleCnt="4"/>
       <dgm:spPr>
         <a:blipFill>
-          <a:blip xmlns:r="http://schemas.openxmlformats.org/officeDocument/2006/relationships" r:embed="rId5">
+          <a:blip xmlns:r="http://schemas.openxmlformats.org/officeDocument/2006/relationships">
             <a:extLst>
               <a:ext uri="{28A0092B-C50C-407E-A947-70E740481C1C}">
                 <a14:useLocalDpi xmlns:a14="http://schemas.microsoft.com/office/drawing/2010/main" val="0"/>
               </a:ext>
               <a:ext uri="{96DAC541-7B7A-43D3-8B79-37D633B846F1}">
-                <asvg:svgBlip xmlns:asvg="http://schemas.microsoft.com/office/drawing/2016/SVG/main" r:embed="rId6"/>
+                <asvg:svgBlip xmlns:asvg="http://schemas.microsoft.com/office/drawing/2016/SVG/main" r:embed="rId3"/>
               </a:ext>
             </a:extLst>
           </a:blip>
@@ -5346,13 +5346,13 @@
       <dgm:prSet presAssocID="{860BBCE7-5D37-4354-A1B4-5757190EAB28}" presName="iconRect" presStyleLbl="node1" presStyleIdx="3" presStyleCnt="4"/>
       <dgm:spPr>
         <a:blipFill>
-          <a:blip xmlns:r="http://schemas.openxmlformats.org/officeDocument/2006/relationships" r:embed="rId7">
+          <a:blip xmlns:r="http://schemas.openxmlformats.org/officeDocument/2006/relationships">
             <a:extLst>
               <a:ext uri="{28A0092B-C50C-407E-A947-70E740481C1C}">
                 <a14:useLocalDpi xmlns:a14="http://schemas.microsoft.com/office/drawing/2010/main" val="0"/>
               </a:ext>
               <a:ext uri="{96DAC541-7B7A-43D3-8B79-37D633B846F1}">
-                <asvg:svgBlip xmlns:asvg="http://schemas.microsoft.com/office/drawing/2016/SVG/main" r:embed="rId8"/>
+                <asvg:svgBlip xmlns:asvg="http://schemas.microsoft.com/office/drawing/2016/SVG/main" r:embed="rId4"/>
               </a:ext>
             </a:extLst>
           </a:blip>
@@ -5684,8 +5684,8 @@
         </a:p>
       </dgm:t>
     </dgm:pt>
-    <mc:AlternateContent xmlns:mc="http://schemas.openxmlformats.org/markup-compatibility/2006">
-      <mc:Choice xmlns:a14="http://schemas.microsoft.com/office/drawing/2010/main" Requires="a14">
+    <mc:AlternateContent xmlns:mc="http://schemas.openxmlformats.org/markup-compatibility/2006" xmlns:a14="http://schemas.microsoft.com/office/drawing/2010/main">
+      <mc:Choice Requires="a14">
         <dgm:pt modelId="{71A022E7-AA2B-4E6E-A4C9-66BF1634A285}">
           <dgm:prSet/>
           <dgm:spPr/>
@@ -5749,7 +5749,7 @@
           </dgm:t>
         </dgm:pt>
       </mc:Choice>
-      <mc:Fallback>
+      <mc:Fallback xmlns="">
         <dgm:pt modelId="{71A022E7-AA2B-4E6E-A4C9-66BF1634A285}">
           <dgm:prSet/>
           <dgm:spPr/>
@@ -5831,8 +5831,8 @@
         </a:p>
       </dgm:t>
     </dgm:pt>
-    <mc:AlternateContent xmlns:mc="http://schemas.openxmlformats.org/markup-compatibility/2006">
-      <mc:Choice xmlns:a14="http://schemas.microsoft.com/office/drawing/2010/main" Requires="a14">
+    <mc:AlternateContent xmlns:mc="http://schemas.openxmlformats.org/markup-compatibility/2006" xmlns:a14="http://schemas.microsoft.com/office/drawing/2010/main">
+      <mc:Choice Requires="a14">
         <dgm:pt modelId="{3C66BE35-CB2D-4478-91AE-3B64E6372FF8}">
           <dgm:prSet/>
           <dgm:spPr/>
@@ -5889,7 +5889,7 @@
           </dgm:t>
         </dgm:pt>
       </mc:Choice>
-      <mc:Fallback>
+      <mc:Fallback xmlns="">
         <dgm:pt modelId="{3C66BE35-CB2D-4478-91AE-3B64E6372FF8}">
           <dgm:prSet/>
           <dgm:spPr/>
@@ -6007,8 +6007,8 @@
         </a:p>
       </dgm:t>
     </dgm:pt>
-    <mc:AlternateContent xmlns:mc="http://schemas.openxmlformats.org/markup-compatibility/2006">
-      <mc:Choice xmlns:a14="http://schemas.microsoft.com/office/drawing/2010/main" Requires="a14">
+    <mc:AlternateContent xmlns:mc="http://schemas.openxmlformats.org/markup-compatibility/2006" xmlns:a14="http://schemas.microsoft.com/office/drawing/2010/main">
+      <mc:Choice Requires="a14">
         <dgm:pt modelId="{364645DD-A0A4-4603-9FDB-80ACBD30ED13}">
           <dgm:prSet/>
           <dgm:spPr/>
@@ -6055,7 +6055,7 @@
           </dgm:t>
         </dgm:pt>
       </mc:Choice>
-      <mc:Fallback>
+      <mc:Fallback xmlns="">
         <dgm:pt modelId="{364645DD-A0A4-4603-9FDB-80ACBD30ED13}">
           <dgm:prSet/>
           <dgm:spPr/>
@@ -7393,13 +7393,13 @@
           <a:avLst/>
         </a:prstGeom>
         <a:blipFill>
-          <a:blip xmlns:r="http://schemas.openxmlformats.org/officeDocument/2006/relationships" r:embed="rId1">
+          <a:blip xmlns:r="http://schemas.openxmlformats.org/officeDocument/2006/relationships">
             <a:extLst>
               <a:ext uri="{28A0092B-C50C-407E-A947-70E740481C1C}">
                 <a14:useLocalDpi xmlns:a14="http://schemas.microsoft.com/office/drawing/2010/main" val="0"/>
               </a:ext>
               <a:ext uri="{96DAC541-7B7A-43D3-8B79-37D633B846F1}">
-                <asvg:svgBlip xmlns:asvg="http://schemas.microsoft.com/office/drawing/2016/SVG/main" r:embed="rId2"/>
+                <asvg:svgBlip xmlns:asvg="http://schemas.microsoft.com/office/drawing/2016/SVG/main" r:embed="rId1"/>
               </a:ext>
             </a:extLst>
           </a:blip>
@@ -7503,13 +7503,13 @@
           <a:avLst/>
         </a:prstGeom>
         <a:blipFill>
-          <a:blip xmlns:r="http://schemas.openxmlformats.org/officeDocument/2006/relationships" r:embed="rId3">
+          <a:blip xmlns:r="http://schemas.openxmlformats.org/officeDocument/2006/relationships">
             <a:extLst>
               <a:ext uri="{28A0092B-C50C-407E-A947-70E740481C1C}">
                 <a14:useLocalDpi xmlns:a14="http://schemas.microsoft.com/office/drawing/2010/main" val="0"/>
               </a:ext>
               <a:ext uri="{96DAC541-7B7A-43D3-8B79-37D633B846F1}">
-                <asvg:svgBlip xmlns:asvg="http://schemas.microsoft.com/office/drawing/2016/SVG/main" r:embed="rId4"/>
+                <asvg:svgBlip xmlns:asvg="http://schemas.microsoft.com/office/drawing/2016/SVG/main" r:embed="rId2"/>
               </a:ext>
             </a:extLst>
           </a:blip>
@@ -7613,13 +7613,13 @@
           <a:avLst/>
         </a:prstGeom>
         <a:blipFill>
-          <a:blip xmlns:r="http://schemas.openxmlformats.org/officeDocument/2006/relationships" r:embed="rId5">
+          <a:blip xmlns:r="http://schemas.openxmlformats.org/officeDocument/2006/relationships">
             <a:extLst>
               <a:ext uri="{28A0092B-C50C-407E-A947-70E740481C1C}">
                 <a14:useLocalDpi xmlns:a14="http://schemas.microsoft.com/office/drawing/2010/main" val="0"/>
               </a:ext>
               <a:ext uri="{96DAC541-7B7A-43D3-8B79-37D633B846F1}">
-                <asvg:svgBlip xmlns:asvg="http://schemas.microsoft.com/office/drawing/2016/SVG/main" r:embed="rId6"/>
+                <asvg:svgBlip xmlns:asvg="http://schemas.microsoft.com/office/drawing/2016/SVG/main" r:embed="rId3"/>
               </a:ext>
             </a:extLst>
           </a:blip>
@@ -7723,13 +7723,13 @@
           <a:avLst/>
         </a:prstGeom>
         <a:blipFill>
-          <a:blip xmlns:r="http://schemas.openxmlformats.org/officeDocument/2006/relationships" r:embed="rId7">
+          <a:blip xmlns:r="http://schemas.openxmlformats.org/officeDocument/2006/relationships">
             <a:extLst>
               <a:ext uri="{28A0092B-C50C-407E-A947-70E740481C1C}">
                 <a14:useLocalDpi xmlns:a14="http://schemas.microsoft.com/office/drawing/2010/main" val="0"/>
               </a:ext>
               <a:ext uri="{96DAC541-7B7A-43D3-8B79-37D633B846F1}">
-                <asvg:svgBlip xmlns:asvg="http://schemas.microsoft.com/office/drawing/2016/SVG/main" r:embed="rId8"/>
+                <asvg:svgBlip xmlns:asvg="http://schemas.microsoft.com/office/drawing/2016/SVG/main" r:embed="rId4"/>
               </a:ext>
             </a:extLst>
           </a:blip>
@@ -17361,7 +17361,7 @@
           <a:p>
             <a:fld id="{B5517EC5-65BF-47F0-8028-C3A40CA760AA}" type="datetimeFigureOut">
               <a:rPr lang="en-US" smtClean="0"/>
-              <a:t>9/6/2025</a:t>
+              <a:t>4/2/2026</a:t>
             </a:fld>
             <a:endParaRPr lang="en-US"/>
           </a:p>
@@ -17559,7 +17559,7 @@
           <a:p>
             <a:fld id="{B5517EC5-65BF-47F0-8028-C3A40CA760AA}" type="datetimeFigureOut">
               <a:rPr lang="en-US" smtClean="0"/>
-              <a:t>9/6/2025</a:t>
+              <a:t>4/2/2026</a:t>
             </a:fld>
             <a:endParaRPr lang="en-US"/>
           </a:p>
@@ -17767,7 +17767,7 @@
           <a:p>
             <a:fld id="{B5517EC5-65BF-47F0-8028-C3A40CA760AA}" type="datetimeFigureOut">
               <a:rPr lang="en-US" smtClean="0"/>
-              <a:t>9/6/2025</a:t>
+              <a:t>4/2/2026</a:t>
             </a:fld>
             <a:endParaRPr lang="en-US"/>
           </a:p>
@@ -17987,7 +17987,7 @@
           <a:p>
             <a:fld id="{5C041930-F8FC-4542-827E-E504F4750562}" type="datetimeFigureOut">
               <a:rPr lang="en-US" smtClean="0"/>
-              <a:t>9/6/2025</a:t>
+              <a:t>4/2/2026</a:t>
             </a:fld>
             <a:endParaRPr lang="en-US"/>
           </a:p>
@@ -18185,7 +18185,7 @@
           <a:p>
             <a:fld id="{5C041930-F8FC-4542-827E-E504F4750562}" type="datetimeFigureOut">
               <a:rPr lang="en-US" smtClean="0"/>
-              <a:t>9/6/2025</a:t>
+              <a:t>4/2/2026</a:t>
             </a:fld>
             <a:endParaRPr lang="en-US"/>
           </a:p>
@@ -18460,7 +18460,7 @@
           <a:p>
             <a:fld id="{5C041930-F8FC-4542-827E-E504F4750562}" type="datetimeFigureOut">
               <a:rPr lang="en-US" smtClean="0"/>
-              <a:t>9/6/2025</a:t>
+              <a:t>4/2/2026</a:t>
             </a:fld>
             <a:endParaRPr lang="en-US"/>
           </a:p>
@@ -18725,7 +18725,7 @@
           <a:p>
             <a:fld id="{5C041930-F8FC-4542-827E-E504F4750562}" type="datetimeFigureOut">
               <a:rPr lang="en-US" smtClean="0"/>
-              <a:t>9/6/2025</a:t>
+              <a:t>4/2/2026</a:t>
             </a:fld>
             <a:endParaRPr lang="en-US"/>
           </a:p>
@@ -19137,7 +19137,7 @@
           <a:p>
             <a:fld id="{5C041930-F8FC-4542-827E-E504F4750562}" type="datetimeFigureOut">
               <a:rPr lang="en-US" smtClean="0"/>
-              <a:t>9/6/2025</a:t>
+              <a:t>4/2/2026</a:t>
             </a:fld>
             <a:endParaRPr lang="en-US"/>
           </a:p>
@@ -19278,7 +19278,7 @@
           <a:p>
             <a:fld id="{5C041930-F8FC-4542-827E-E504F4750562}" type="datetimeFigureOut">
               <a:rPr lang="en-US" smtClean="0"/>
-              <a:t>9/6/2025</a:t>
+              <a:t>4/2/2026</a:t>
             </a:fld>
             <a:endParaRPr lang="en-US"/>
           </a:p>
@@ -19391,7 +19391,7 @@
           <a:p>
             <a:fld id="{5C041930-F8FC-4542-827E-E504F4750562}" type="datetimeFigureOut">
               <a:rPr lang="en-US" smtClean="0"/>
-              <a:t>9/6/2025</a:t>
+              <a:t>4/2/2026</a:t>
             </a:fld>
             <a:endParaRPr lang="en-US"/>
           </a:p>
@@ -19702,7 +19702,7 @@
           <a:p>
             <a:fld id="{5C041930-F8FC-4542-827E-E504F4750562}" type="datetimeFigureOut">
               <a:rPr lang="en-US" smtClean="0"/>
-              <a:t>9/6/2025</a:t>
+              <a:t>4/2/2026</a:t>
             </a:fld>
             <a:endParaRPr lang="en-US"/>
           </a:p>
@@ -19900,7 +19900,7 @@
           <a:p>
             <a:fld id="{B5517EC5-65BF-47F0-8028-C3A40CA760AA}" type="datetimeFigureOut">
               <a:rPr lang="en-US" smtClean="0"/>
-              <a:t>9/6/2025</a:t>
+              <a:t>4/2/2026</a:t>
             </a:fld>
             <a:endParaRPr lang="en-US"/>
           </a:p>
@@ -20188,7 +20188,7 @@
           <a:p>
             <a:fld id="{5C041930-F8FC-4542-827E-E504F4750562}" type="datetimeFigureOut">
               <a:rPr lang="en-US" smtClean="0"/>
-              <a:t>9/6/2025</a:t>
+              <a:t>4/2/2026</a:t>
             </a:fld>
             <a:endParaRPr lang="en-US"/>
           </a:p>
@@ -20386,7 +20386,7 @@
           <a:p>
             <a:fld id="{5C041930-F8FC-4542-827E-E504F4750562}" type="datetimeFigureOut">
               <a:rPr lang="en-US" smtClean="0"/>
-              <a:t>9/6/2025</a:t>
+              <a:t>4/2/2026</a:t>
             </a:fld>
             <a:endParaRPr lang="en-US"/>
           </a:p>
@@ -20594,7 +20594,7 @@
           <a:p>
             <a:fld id="{5C041930-F8FC-4542-827E-E504F4750562}" type="datetimeFigureOut">
               <a:rPr lang="en-US" smtClean="0"/>
-              <a:t>9/6/2025</a:t>
+              <a:t>4/2/2026</a:t>
             </a:fld>
             <a:endParaRPr lang="en-US"/>
           </a:p>
@@ -20869,7 +20869,7 @@
           <a:p>
             <a:fld id="{B5517EC5-65BF-47F0-8028-C3A40CA760AA}" type="datetimeFigureOut">
               <a:rPr lang="en-US" smtClean="0"/>
-              <a:t>9/6/2025</a:t>
+              <a:t>4/2/2026</a:t>
             </a:fld>
             <a:endParaRPr lang="en-US"/>
           </a:p>
@@ -21134,7 +21134,7 @@
           <a:p>
             <a:fld id="{B5517EC5-65BF-47F0-8028-C3A40CA760AA}" type="datetimeFigureOut">
               <a:rPr lang="en-US" smtClean="0"/>
-              <a:t>9/6/2025</a:t>
+              <a:t>4/2/2026</a:t>
             </a:fld>
             <a:endParaRPr lang="en-US"/>
           </a:p>
@@ -21546,7 +21546,7 @@
           <a:p>
             <a:fld id="{B5517EC5-65BF-47F0-8028-C3A40CA760AA}" type="datetimeFigureOut">
               <a:rPr lang="en-US" smtClean="0"/>
-              <a:t>9/6/2025</a:t>
+              <a:t>4/2/2026</a:t>
             </a:fld>
             <a:endParaRPr lang="en-US"/>
           </a:p>
@@ -21687,7 +21687,7 @@
           <a:p>
             <a:fld id="{B5517EC5-65BF-47F0-8028-C3A40CA760AA}" type="datetimeFigureOut">
               <a:rPr lang="en-US" smtClean="0"/>
-              <a:t>9/6/2025</a:t>
+              <a:t>4/2/2026</a:t>
             </a:fld>
             <a:endParaRPr lang="en-US"/>
           </a:p>
@@ -21800,7 +21800,7 @@
           <a:p>
             <a:fld id="{B5517EC5-65BF-47F0-8028-C3A40CA760AA}" type="datetimeFigureOut">
               <a:rPr lang="en-US" smtClean="0"/>
-              <a:t>9/6/2025</a:t>
+              <a:t>4/2/2026</a:t>
             </a:fld>
             <a:endParaRPr lang="en-US"/>
           </a:p>
@@ -22111,7 +22111,7 @@
           <a:p>
             <a:fld id="{B5517EC5-65BF-47F0-8028-C3A40CA760AA}" type="datetimeFigureOut">
               <a:rPr lang="en-US" smtClean="0"/>
-              <a:t>9/6/2025</a:t>
+              <a:t>4/2/2026</a:t>
             </a:fld>
             <a:endParaRPr lang="en-US"/>
           </a:p>
@@ -22399,7 +22399,7 @@
           <a:p>
             <a:fld id="{B5517EC5-65BF-47F0-8028-C3A40CA760AA}" type="datetimeFigureOut">
               <a:rPr lang="en-US" smtClean="0"/>
-              <a:t>9/6/2025</a:t>
+              <a:t>4/2/2026</a:t>
             </a:fld>
             <a:endParaRPr lang="en-US"/>
           </a:p>
@@ -22640,7 +22640,7 @@
           <a:p>
             <a:fld id="{B5517EC5-65BF-47F0-8028-C3A40CA760AA}" type="datetimeFigureOut">
               <a:rPr lang="en-US" smtClean="0"/>
-              <a:t>9/6/2025</a:t>
+              <a:t>4/2/2026</a:t>
             </a:fld>
             <a:endParaRPr lang="en-US"/>
           </a:p>
@@ -23208,7 +23208,7 @@
           <a:p>
             <a:fld id="{5C041930-F8FC-4542-827E-E504F4750562}" type="datetimeFigureOut">
               <a:rPr lang="en-US" smtClean="0"/>
-              <a:t>9/6/2025</a:t>
+              <a:t>4/2/2026</a:t>
             </a:fld>
             <a:endParaRPr lang="en-US"/>
           </a:p>
@@ -23768,7 +23768,7 @@
           <a:p>
             <a:pPr algn="l"/>
             <a:r>
-              <a:rPr lang="en-US" sz="4800"/>
+              <a:rPr lang="en-US" sz="4800" dirty="0"/>
               <a:t>Data Structures and Algorithms I.</a:t>
             </a:r>
           </a:p>
@@ -24148,7 +24148,7 @@
                   <a:srgbClr val="FFFFFF"/>
                 </a:solidFill>
               </a:rPr>
-              <a:t>2025/26. Autumn Semester</a:t>
+              <a:t>2025/26. Spring Semester</a:t>
             </a:r>
           </a:p>
           <a:p>
@@ -24878,8 +24878,8 @@
           <a:chExt cx="0" cy="0"/>
         </a:xfrm>
       </p:grpSpPr>
-      <mc:AlternateContent xmlns:mc="http://schemas.openxmlformats.org/markup-compatibility/2006">
-        <mc:Choice xmlns:a14="http://schemas.microsoft.com/office/drawing/2010/main" Requires="a14">
+      <mc:AlternateContent xmlns:mc="http://schemas.openxmlformats.org/markup-compatibility/2006" xmlns:a14="http://schemas.microsoft.com/office/drawing/2010/main">
+        <mc:Choice Requires="a14">
           <p:graphicFrame>
             <p:nvGraphicFramePr>
               <p:cNvPr id="5" name="Content Placeholder 2">
@@ -24912,7 +24912,7 @@
             </a:graphic>
           </p:graphicFrame>
         </mc:Choice>
-        <mc:Fallback>
+        <mc:Fallback xmlns="">
           <p:graphicFrame>
             <p:nvGraphicFramePr>
               <p:cNvPr id="5" name="Content Placeholder 2">
@@ -24940,7 +24940,7 @@
             </p:xfrm>
             <a:graphic>
               <a:graphicData uri="http://schemas.openxmlformats.org/drawingml/2006/diagram">
-                <dgm:relIds xmlns:dgm="http://schemas.openxmlformats.org/drawingml/2006/diagram" xmlns:r="http://schemas.openxmlformats.org/officeDocument/2006/relationships" r:dm="rId7" r:lo="rId3" r:qs="rId4" r:cs="rId5"/>
+                <dgm:relIds xmlns:dgm="http://schemas.openxmlformats.org/drawingml/2006/diagram" xmlns:r="http://schemas.openxmlformats.org/officeDocument/2006/relationships" r:dm="rId7" r:lo="rId8" r:qs="rId9" r:cs="rId10"/>
               </a:graphicData>
             </a:graphic>
           </p:graphicFrame>
@@ -35354,68 +35354,68 @@
           <a:custGeom>
             <a:avLst/>
             <a:gdLst>
-              <a:gd name="connsiteX0" fmla="*/ 0 w 3255095"/>
-              <a:gd name="connsiteY0" fmla="*/ 0 h 18288"/>
-              <a:gd name="connsiteX1" fmla="*/ 618468 w 3255095"/>
-              <a:gd name="connsiteY1" fmla="*/ 0 h 18288"/>
-              <a:gd name="connsiteX2" fmla="*/ 1269487 w 3255095"/>
-              <a:gd name="connsiteY2" fmla="*/ 0 h 18288"/>
-              <a:gd name="connsiteX3" fmla="*/ 1953057 w 3255095"/>
-              <a:gd name="connsiteY3" fmla="*/ 0 h 18288"/>
-              <a:gd name="connsiteX4" fmla="*/ 2636627 w 3255095"/>
-              <a:gd name="connsiteY4" fmla="*/ 0 h 18288"/>
-              <a:gd name="connsiteX5" fmla="*/ 3255095 w 3255095"/>
-              <a:gd name="connsiteY5" fmla="*/ 0 h 18288"/>
-              <a:gd name="connsiteX6" fmla="*/ 3255095 w 3255095"/>
-              <a:gd name="connsiteY6" fmla="*/ 18288 h 18288"/>
-              <a:gd name="connsiteX7" fmla="*/ 2538974 w 3255095"/>
-              <a:gd name="connsiteY7" fmla="*/ 18288 h 18288"/>
-              <a:gd name="connsiteX8" fmla="*/ 1822853 w 3255095"/>
-              <a:gd name="connsiteY8" fmla="*/ 18288 h 18288"/>
-              <a:gd name="connsiteX9" fmla="*/ 1171834 w 3255095"/>
-              <a:gd name="connsiteY9" fmla="*/ 18288 h 18288"/>
-              <a:gd name="connsiteX10" fmla="*/ 0 w 3255095"/>
-              <a:gd name="connsiteY10" fmla="*/ 18288 h 18288"/>
-              <a:gd name="connsiteX11" fmla="*/ 0 w 3255095"/>
-              <a:gd name="connsiteY11" fmla="*/ 0 h 18288"/>
+              <a:gd name="csX0" fmla="*/ 0 w 3255095"/>
+              <a:gd name="csY0" fmla="*/ 0 h 18288"/>
+              <a:gd name="csX1" fmla="*/ 618468 w 3255095"/>
+              <a:gd name="csY1" fmla="*/ 0 h 18288"/>
+              <a:gd name="csX2" fmla="*/ 1269487 w 3255095"/>
+              <a:gd name="csY2" fmla="*/ 0 h 18288"/>
+              <a:gd name="csX3" fmla="*/ 1953057 w 3255095"/>
+              <a:gd name="csY3" fmla="*/ 0 h 18288"/>
+              <a:gd name="csX4" fmla="*/ 2636627 w 3255095"/>
+              <a:gd name="csY4" fmla="*/ 0 h 18288"/>
+              <a:gd name="csX5" fmla="*/ 3255095 w 3255095"/>
+              <a:gd name="csY5" fmla="*/ 0 h 18288"/>
+              <a:gd name="csX6" fmla="*/ 3255095 w 3255095"/>
+              <a:gd name="csY6" fmla="*/ 18288 h 18288"/>
+              <a:gd name="csX7" fmla="*/ 2538974 w 3255095"/>
+              <a:gd name="csY7" fmla="*/ 18288 h 18288"/>
+              <a:gd name="csX8" fmla="*/ 1822853 w 3255095"/>
+              <a:gd name="csY8" fmla="*/ 18288 h 18288"/>
+              <a:gd name="csX9" fmla="*/ 1171834 w 3255095"/>
+              <a:gd name="csY9" fmla="*/ 18288 h 18288"/>
+              <a:gd name="csX10" fmla="*/ 0 w 3255095"/>
+              <a:gd name="csY10" fmla="*/ 18288 h 18288"/>
+              <a:gd name="csX11" fmla="*/ 0 w 3255095"/>
+              <a:gd name="csY11" fmla="*/ 0 h 18288"/>
             </a:gdLst>
             <a:ahLst/>
             <a:cxnLst>
               <a:cxn ang="0">
-                <a:pos x="connsiteX0" y="connsiteY0"/>
+                <a:pos x="csX0" y="csY0"/>
               </a:cxn>
               <a:cxn ang="0">
-                <a:pos x="connsiteX1" y="connsiteY1"/>
+                <a:pos x="csX1" y="csY1"/>
               </a:cxn>
               <a:cxn ang="0">
-                <a:pos x="connsiteX2" y="connsiteY2"/>
+                <a:pos x="csX2" y="csY2"/>
               </a:cxn>
               <a:cxn ang="0">
-                <a:pos x="connsiteX3" y="connsiteY3"/>
+                <a:pos x="csX3" y="csY3"/>
               </a:cxn>
               <a:cxn ang="0">
-                <a:pos x="connsiteX4" y="connsiteY4"/>
+                <a:pos x="csX4" y="csY4"/>
               </a:cxn>
               <a:cxn ang="0">
-                <a:pos x="connsiteX5" y="connsiteY5"/>
+                <a:pos x="csX5" y="csY5"/>
               </a:cxn>
               <a:cxn ang="0">
-                <a:pos x="connsiteX6" y="connsiteY6"/>
+                <a:pos x="csX6" y="csY6"/>
               </a:cxn>
               <a:cxn ang="0">
-                <a:pos x="connsiteX7" y="connsiteY7"/>
+                <a:pos x="csX7" y="csY7"/>
               </a:cxn>
               <a:cxn ang="0">
-                <a:pos x="connsiteX8" y="connsiteY8"/>
+                <a:pos x="csX8" y="csY8"/>
               </a:cxn>
               <a:cxn ang="0">
-                <a:pos x="connsiteX9" y="connsiteY9"/>
+                <a:pos x="csX9" y="csY9"/>
               </a:cxn>
               <a:cxn ang="0">
-                <a:pos x="connsiteX10" y="connsiteY10"/>
+                <a:pos x="csX10" y="csY10"/>
               </a:cxn>
               <a:cxn ang="0">
-                <a:pos x="connsiteX11" y="connsiteY11"/>
+                <a:pos x="csX11" y="csY11"/>
               </a:cxn>
             </a:cxnLst>
             <a:rect l="l" t="t" r="r" b="b"/>
@@ -35811,68 +35811,68 @@
           <a:custGeom>
             <a:avLst/>
             <a:gdLst>
-              <a:gd name="connsiteX0" fmla="*/ 0 w 3255095"/>
-              <a:gd name="connsiteY0" fmla="*/ 0 h 18288"/>
-              <a:gd name="connsiteX1" fmla="*/ 618468 w 3255095"/>
-              <a:gd name="connsiteY1" fmla="*/ 0 h 18288"/>
-              <a:gd name="connsiteX2" fmla="*/ 1269487 w 3255095"/>
-              <a:gd name="connsiteY2" fmla="*/ 0 h 18288"/>
-              <a:gd name="connsiteX3" fmla="*/ 1953057 w 3255095"/>
-              <a:gd name="connsiteY3" fmla="*/ 0 h 18288"/>
-              <a:gd name="connsiteX4" fmla="*/ 2636627 w 3255095"/>
-              <a:gd name="connsiteY4" fmla="*/ 0 h 18288"/>
-              <a:gd name="connsiteX5" fmla="*/ 3255095 w 3255095"/>
-              <a:gd name="connsiteY5" fmla="*/ 0 h 18288"/>
-              <a:gd name="connsiteX6" fmla="*/ 3255095 w 3255095"/>
-              <a:gd name="connsiteY6" fmla="*/ 18288 h 18288"/>
-              <a:gd name="connsiteX7" fmla="*/ 2538974 w 3255095"/>
-              <a:gd name="connsiteY7" fmla="*/ 18288 h 18288"/>
-              <a:gd name="connsiteX8" fmla="*/ 1822853 w 3255095"/>
-              <a:gd name="connsiteY8" fmla="*/ 18288 h 18288"/>
-              <a:gd name="connsiteX9" fmla="*/ 1171834 w 3255095"/>
-              <a:gd name="connsiteY9" fmla="*/ 18288 h 18288"/>
-              <a:gd name="connsiteX10" fmla="*/ 0 w 3255095"/>
-              <a:gd name="connsiteY10" fmla="*/ 18288 h 18288"/>
-              <a:gd name="connsiteX11" fmla="*/ 0 w 3255095"/>
-              <a:gd name="connsiteY11" fmla="*/ 0 h 18288"/>
+              <a:gd name="csX0" fmla="*/ 0 w 3255095"/>
+              <a:gd name="csY0" fmla="*/ 0 h 18288"/>
+              <a:gd name="csX1" fmla="*/ 618468 w 3255095"/>
+              <a:gd name="csY1" fmla="*/ 0 h 18288"/>
+              <a:gd name="csX2" fmla="*/ 1269487 w 3255095"/>
+              <a:gd name="csY2" fmla="*/ 0 h 18288"/>
+              <a:gd name="csX3" fmla="*/ 1953057 w 3255095"/>
+              <a:gd name="csY3" fmla="*/ 0 h 18288"/>
+              <a:gd name="csX4" fmla="*/ 2636627 w 3255095"/>
+              <a:gd name="csY4" fmla="*/ 0 h 18288"/>
+              <a:gd name="csX5" fmla="*/ 3255095 w 3255095"/>
+              <a:gd name="csY5" fmla="*/ 0 h 18288"/>
+              <a:gd name="csX6" fmla="*/ 3255095 w 3255095"/>
+              <a:gd name="csY6" fmla="*/ 18288 h 18288"/>
+              <a:gd name="csX7" fmla="*/ 2538974 w 3255095"/>
+              <a:gd name="csY7" fmla="*/ 18288 h 18288"/>
+              <a:gd name="csX8" fmla="*/ 1822853 w 3255095"/>
+              <a:gd name="csY8" fmla="*/ 18288 h 18288"/>
+              <a:gd name="csX9" fmla="*/ 1171834 w 3255095"/>
+              <a:gd name="csY9" fmla="*/ 18288 h 18288"/>
+              <a:gd name="csX10" fmla="*/ 0 w 3255095"/>
+              <a:gd name="csY10" fmla="*/ 18288 h 18288"/>
+              <a:gd name="csX11" fmla="*/ 0 w 3255095"/>
+              <a:gd name="csY11" fmla="*/ 0 h 18288"/>
             </a:gdLst>
             <a:ahLst/>
             <a:cxnLst>
               <a:cxn ang="0">
-                <a:pos x="connsiteX0" y="connsiteY0"/>
+                <a:pos x="csX0" y="csY0"/>
               </a:cxn>
               <a:cxn ang="0">
-                <a:pos x="connsiteX1" y="connsiteY1"/>
+                <a:pos x="csX1" y="csY1"/>
               </a:cxn>
               <a:cxn ang="0">
-                <a:pos x="connsiteX2" y="connsiteY2"/>
+                <a:pos x="csX2" y="csY2"/>
               </a:cxn>
               <a:cxn ang="0">
-                <a:pos x="connsiteX3" y="connsiteY3"/>
+                <a:pos x="csX3" y="csY3"/>
               </a:cxn>
               <a:cxn ang="0">
-                <a:pos x="connsiteX4" y="connsiteY4"/>
+                <a:pos x="csX4" y="csY4"/>
               </a:cxn>
               <a:cxn ang="0">
-                <a:pos x="connsiteX5" y="connsiteY5"/>
+                <a:pos x="csX5" y="csY5"/>
               </a:cxn>
               <a:cxn ang="0">
-                <a:pos x="connsiteX6" y="connsiteY6"/>
+                <a:pos x="csX6" y="csY6"/>
               </a:cxn>
               <a:cxn ang="0">
-                <a:pos x="connsiteX7" y="connsiteY7"/>
+                <a:pos x="csX7" y="csY7"/>
               </a:cxn>
               <a:cxn ang="0">
-                <a:pos x="connsiteX8" y="connsiteY8"/>
+                <a:pos x="csX8" y="csY8"/>
               </a:cxn>
               <a:cxn ang="0">
-                <a:pos x="connsiteX9" y="connsiteY9"/>
+                <a:pos x="csX9" y="csY9"/>
               </a:cxn>
               <a:cxn ang="0">
-                <a:pos x="connsiteX10" y="connsiteY10"/>
+                <a:pos x="csX10" y="csY10"/>
               </a:cxn>
               <a:cxn ang="0">
-                <a:pos x="connsiteX11" y="connsiteY11"/>
+                <a:pos x="csX11" y="csY11"/>
               </a:cxn>
             </a:cxnLst>
             <a:rect l="l" t="t" r="r" b="b"/>
@@ -36267,68 +36267,68 @@
           <a:custGeom>
             <a:avLst/>
             <a:gdLst>
-              <a:gd name="connsiteX0" fmla="*/ 0 w 3255095"/>
-              <a:gd name="connsiteY0" fmla="*/ 0 h 18288"/>
-              <a:gd name="connsiteX1" fmla="*/ 618468 w 3255095"/>
-              <a:gd name="connsiteY1" fmla="*/ 0 h 18288"/>
-              <a:gd name="connsiteX2" fmla="*/ 1269487 w 3255095"/>
-              <a:gd name="connsiteY2" fmla="*/ 0 h 18288"/>
-              <a:gd name="connsiteX3" fmla="*/ 1953057 w 3255095"/>
-              <a:gd name="connsiteY3" fmla="*/ 0 h 18288"/>
-              <a:gd name="connsiteX4" fmla="*/ 2636627 w 3255095"/>
-              <a:gd name="connsiteY4" fmla="*/ 0 h 18288"/>
-              <a:gd name="connsiteX5" fmla="*/ 3255095 w 3255095"/>
-              <a:gd name="connsiteY5" fmla="*/ 0 h 18288"/>
-              <a:gd name="connsiteX6" fmla="*/ 3255095 w 3255095"/>
-              <a:gd name="connsiteY6" fmla="*/ 18288 h 18288"/>
-              <a:gd name="connsiteX7" fmla="*/ 2538974 w 3255095"/>
-              <a:gd name="connsiteY7" fmla="*/ 18288 h 18288"/>
-              <a:gd name="connsiteX8" fmla="*/ 1822853 w 3255095"/>
-              <a:gd name="connsiteY8" fmla="*/ 18288 h 18288"/>
-              <a:gd name="connsiteX9" fmla="*/ 1171834 w 3255095"/>
-              <a:gd name="connsiteY9" fmla="*/ 18288 h 18288"/>
-              <a:gd name="connsiteX10" fmla="*/ 0 w 3255095"/>
-              <a:gd name="connsiteY10" fmla="*/ 18288 h 18288"/>
-              <a:gd name="connsiteX11" fmla="*/ 0 w 3255095"/>
-              <a:gd name="connsiteY11" fmla="*/ 0 h 18288"/>
+              <a:gd name="csX0" fmla="*/ 0 w 3255095"/>
+              <a:gd name="csY0" fmla="*/ 0 h 18288"/>
+              <a:gd name="csX1" fmla="*/ 618468 w 3255095"/>
+              <a:gd name="csY1" fmla="*/ 0 h 18288"/>
+              <a:gd name="csX2" fmla="*/ 1269487 w 3255095"/>
+              <a:gd name="csY2" fmla="*/ 0 h 18288"/>
+              <a:gd name="csX3" fmla="*/ 1953057 w 3255095"/>
+              <a:gd name="csY3" fmla="*/ 0 h 18288"/>
+              <a:gd name="csX4" fmla="*/ 2636627 w 3255095"/>
+              <a:gd name="csY4" fmla="*/ 0 h 18288"/>
+              <a:gd name="csX5" fmla="*/ 3255095 w 3255095"/>
+              <a:gd name="csY5" fmla="*/ 0 h 18288"/>
+              <a:gd name="csX6" fmla="*/ 3255095 w 3255095"/>
+              <a:gd name="csY6" fmla="*/ 18288 h 18288"/>
+              <a:gd name="csX7" fmla="*/ 2538974 w 3255095"/>
+              <a:gd name="csY7" fmla="*/ 18288 h 18288"/>
+              <a:gd name="csX8" fmla="*/ 1822853 w 3255095"/>
+              <a:gd name="csY8" fmla="*/ 18288 h 18288"/>
+              <a:gd name="csX9" fmla="*/ 1171834 w 3255095"/>
+              <a:gd name="csY9" fmla="*/ 18288 h 18288"/>
+              <a:gd name="csX10" fmla="*/ 0 w 3255095"/>
+              <a:gd name="csY10" fmla="*/ 18288 h 18288"/>
+              <a:gd name="csX11" fmla="*/ 0 w 3255095"/>
+              <a:gd name="csY11" fmla="*/ 0 h 18288"/>
             </a:gdLst>
             <a:ahLst/>
             <a:cxnLst>
               <a:cxn ang="0">
-                <a:pos x="connsiteX0" y="connsiteY0"/>
+                <a:pos x="csX0" y="csY0"/>
               </a:cxn>
               <a:cxn ang="0">
-                <a:pos x="connsiteX1" y="connsiteY1"/>
+                <a:pos x="csX1" y="csY1"/>
               </a:cxn>
               <a:cxn ang="0">
-                <a:pos x="connsiteX2" y="connsiteY2"/>
+                <a:pos x="csX2" y="csY2"/>
               </a:cxn>
               <a:cxn ang="0">
-                <a:pos x="connsiteX3" y="connsiteY3"/>
+                <a:pos x="csX3" y="csY3"/>
               </a:cxn>
               <a:cxn ang="0">
-                <a:pos x="connsiteX4" y="connsiteY4"/>
+                <a:pos x="csX4" y="csY4"/>
               </a:cxn>
               <a:cxn ang="0">
-                <a:pos x="connsiteX5" y="connsiteY5"/>
+                <a:pos x="csX5" y="csY5"/>
               </a:cxn>
               <a:cxn ang="0">
-                <a:pos x="connsiteX6" y="connsiteY6"/>
+                <a:pos x="csX6" y="csY6"/>
               </a:cxn>
               <a:cxn ang="0">
-                <a:pos x="connsiteX7" y="connsiteY7"/>
+                <a:pos x="csX7" y="csY7"/>
               </a:cxn>
               <a:cxn ang="0">
-                <a:pos x="connsiteX8" y="connsiteY8"/>
+                <a:pos x="csX8" y="csY8"/>
               </a:cxn>
               <a:cxn ang="0">
-                <a:pos x="connsiteX9" y="connsiteY9"/>
+                <a:pos x="csX9" y="csY9"/>
               </a:cxn>
               <a:cxn ang="0">
-                <a:pos x="connsiteX10" y="connsiteY10"/>
+                <a:pos x="csX10" y="csY10"/>
               </a:cxn>
               <a:cxn ang="0">
-                <a:pos x="connsiteX11" y="connsiteY11"/>
+                <a:pos x="csX11" y="csY11"/>
               </a:cxn>
             </a:cxnLst>
             <a:rect l="l" t="t" r="r" b="b"/>
